--- a/assets/powerpoints/module-achat/C1-ce-que-couvre-la-garantie.pptx
+++ b/assets/powerpoints/module-achat/C1-ce-que-couvre-la-garantie.pptx
@@ -10365,7 +10365,25 @@
                 </a:solidFill>
                 <a:latin typeface="Verdana"/>
               </a:rPr>
-              <a:t>C'est la formule standard. Elle ne comprend pas toujours le &lt;b&gt;déplacement&lt;/b&gt; — souvent quatre-vingt-dix dollars. Certaines garanties prolongées le couvrent ; la garantie de base rarement. À demander avant d'acheter.</a:t>
+              <a:t>C'est la formule standard. Elle ne comprend pas toujours le </a:t>
+            </a:r>
+            <a:r>
+              <a:rPr sz="2000" b="1" i="0">
+                <a:solidFill>
+                  <a:srgbClr val="4B4F52"/>
+                </a:solidFill>
+                <a:latin typeface="Verdana"/>
+              </a:rPr>
+              <a:t>déplacement</a:t>
+            </a:r>
+            <a:r>
+              <a:rPr sz="2000" b="0" i="0">
+                <a:solidFill>
+                  <a:srgbClr val="4B4F52"/>
+                </a:solidFill>
+                <a:latin typeface="Verdana"/>
+              </a:rPr>
+              <a:t> — souvent quatre-vingt-dix dollars. Certaines garanties prolongées le couvrent ; la garantie de base rarement. À demander avant d'acheter.</a:t>
             </a:r>
           </a:p>
         </p:txBody>
